--- a/slides/vibe-coding-workshop.pptx
+++ b/slides/vibe-coding-workshop.pptx
@@ -4074,7 +4074,7 @@
                 <a:ea typeface="Microsoft JhengHei" pitchFamily="34" charset="-122"/>
                 <a:cs typeface="Microsoft JhengHei" pitchFamily="34" charset="-120"/>
               </a:rPr>
-              <a:t>全程以「翠湖苑」建案為例，四個階段逐步累積</a:t>
+              <a:t>全程以「沐森」建案為例，四個階段逐步累積</a:t>
             </a:r>
             <a:endParaRPr lang="en-US" sz="1300" dirty="0"/>
           </a:p>
@@ -5635,7 +5635,7 @@
                 <a:ea typeface="Microsoft JhengHei" pitchFamily="34" charset="-122"/>
                 <a:cs typeface="Microsoft JhengHei" pitchFamily="34" charset="-120"/>
               </a:rPr>
-              <a:t>只是把資料夾裡的圖片檔換掉。</a:t>
+              <a:t>只是多了資料夾裡的圖片檔。</a:t>
             </a:r>
             <a:endParaRPr lang="en-US" sz="1500" dirty="0"/>
           </a:p>
@@ -6486,7 +6486,7 @@
                 <a:ea typeface="Courier New" pitchFamily="34" charset="-122"/>
                 <a:cs typeface="Courier New" pitchFamily="34" charset="-120"/>
               </a:rPr>
-              <a:t>翠湖苑網站/</a:t>
+              <a:t>沐森網站/</a:t>
             </a:r>
             <a:endParaRPr lang="en-US" sz="1300" dirty="0"/>
           </a:p>
@@ -21312,7 +21312,7 @@
                 <a:ea typeface="Microsoft JhengHei" pitchFamily="34" charset="-122"/>
                 <a:cs typeface="Microsoft JhengHei" pitchFamily="34" charset="-120"/>
               </a:rPr>
-              <a:t>一整份建案介紹網頁：建案名、理念、特色、</a:t>
+              <a:t>一整份建案介紹網頁：建案名、生活尺度、</a:t>
             </a:r>
             <a:endParaRPr lang="en-US" sz="1500" dirty="0"/>
           </a:p>
@@ -21332,7 +21332,7 @@
                 <a:ea typeface="Microsoft JhengHei" pitchFamily="34" charset="-122"/>
                 <a:cs typeface="Microsoft JhengHei" pitchFamily="34" charset="-120"/>
               </a:rPr>
-              <a:t>格局表、生活機能、聯絡方式。</a:t>
+              <a:t>理念、規劃特色、格局表、聯絡方式。</a:t>
             </a:r>
             <a:endParaRPr lang="en-US" sz="1500" dirty="0"/>
           </a:p>
@@ -21602,7 +21602,7 @@
                 <a:ea typeface="Microsoft JhengHei" pitchFamily="34" charset="-122"/>
                 <a:cs typeface="Microsoft JhengHei" pitchFamily="34" charset="-120"/>
               </a:rPr>
-              <a:t>「幫我做一個建案介紹網頁，建案叫翠湖苑，在台中七期，主打面湖景觀，要有格局表和生活機能。」</a:t>
+              <a:t>「幫我做一個建案介紹網頁，建案叫沐森，在台中七期，主打面湖景觀，要有格局表和生活機能。」</a:t>
             </a:r>
             <a:endParaRPr lang="en-US" sz="1900" dirty="0"/>
           </a:p>
@@ -22341,7 +22341,7 @@
                 <a:ea typeface="Microsoft JhengHei" pitchFamily="34" charset="-122"/>
                 <a:cs typeface="Microsoft JhengHei" pitchFamily="34" charset="-120"/>
               </a:rPr>
-              <a:t>「翠湖苑，台中七期，低層電梯宅，主打面湖景觀。要有建案理念、格局表、生活機能、聯絡方式。調性沉靜有質感，不要像廣告傳單。」</a:t>
+              <a:t>「沐森，台中七期，低層電梯宅，主打面湖景觀。要有建案理念、格局表、生活機能、聯絡方式。調性沉靜有質感，不要像廣告傳單。」</a:t>
             </a:r>
             <a:endParaRPr lang="en-US" sz="1500" dirty="0"/>
           </a:p>
@@ -22828,7 +22828,7 @@
                 <a:ea typeface="Microsoft JhengHei" pitchFamily="34" charset="-122"/>
                 <a:cs typeface="Microsoft JhengHei" pitchFamily="34" charset="-120"/>
               </a:rPr>
-              <a:t>翠湖苑，台中七期，低層電梯宅</a:t>
+              <a:t>沐森，台中七期，低層電梯宅</a:t>
             </a:r>
             <a:endParaRPr lang="en-US" sz="1500" dirty="0"/>
           </a:p>
